--- a/classes/parte-5-explotacion-de-sistemas-y-binarios/119-buffer-overflow-en-stack-teoria/clase-119-presentacion.pptx
+++ b/classes/parte-5-explotacion-de-sistemas-y-binarios/119-buffer-overflow-en-stack-teoria/clase-119-presentacion.pptx
@@ -17,6 +17,9 @@
     <p:sldId id="265" r:id="rId16"/>
     <p:sldId id="266" r:id="rId17"/>
     <p:sldId id="267" r:id="rId18"/>
+    <p:sldId id="268" r:id="rId19"/>
+    <p:sldId id="269" r:id="rId20"/>
+    <p:sldId id="270" r:id="rId21"/>
   </p:sldIdLst>
   <p:sldSz cx="9144000" cy="6858000" type="screen4x3"/>
   <p:notesSz cx="6858000" cy="9144000"/>
@@ -3198,7 +3201,7 @@
                   <a:srgbClr val="0B3D2E"/>
                 </a:solidFill>
               </a:rPr>
-              <a:t>⚠️ Errores comunes</a:t>
+              <a:t>✍️ Ejercicios</a:t>
             </a:r>
           </a:p>
         </p:txBody>
@@ -3236,67 +3239,82 @@
                   <a:srgbClr val="22282E"/>
                 </a:solidFill>
               </a:rPr>
-              <a:t>•  Offset calculado ≠ real — Olvidaste el saved RBP (8 bytes) o el padding de alineación</a:t>
-            </a:r>
-          </a:p>
-          <a:p>
-            <a:pPr>
-              <a:spcAft>
-                <a:spcPts val="600"/>
-              </a:spcAft>
-            </a:pPr>
-            <a:r>
-              <a:rPr sz="1500">
-                <a:solidFill>
-                  <a:srgbClr val="22282E"/>
-                </a:solidFill>
-              </a:rPr>
-              <a:t>•  "Mi overflow no controla RIP" — Hay stack canary; lo verás en checksec (clase 122)</a:t>
-            </a:r>
-          </a:p>
-          <a:p>
-            <a:pPr>
-              <a:spcAft>
-                <a:spcPts val="600"/>
-              </a:spcAft>
-            </a:pPr>
-            <a:r>
-              <a:rPr sz="1500">
-                <a:solidFill>
-                  <a:srgbClr val="22282E"/>
-                </a:solidFill>
-              </a:rPr>
-              <a:t>•  Confundir dirección alta/baja — El stack crece hacia abajo; dibújalo siempre</a:t>
-            </a:r>
-          </a:p>
-          <a:p>
-            <a:pPr>
-              <a:spcAft>
-                <a:spcPts val="600"/>
-              </a:spcAft>
-            </a:pPr>
-            <a:r>
-              <a:rPr sz="1500">
-                <a:solidFill>
-                  <a:srgbClr val="22282E"/>
-                </a:solidFill>
-              </a:rPr>
-              <a:t>•  Creer que strncpy es infalible — Puede dejar la cadena sin \0; revisa longitudes</a:t>
-            </a:r>
-          </a:p>
-          <a:p>
-            <a:pPr>
-              <a:spcAft>
-                <a:spcPts val="600"/>
-              </a:spcAft>
-            </a:pPr>
-            <a:r>
-              <a:rPr sz="1500">
-                <a:solidFill>
-                  <a:srgbClr val="22282E"/>
-                </a:solidFill>
-              </a:rPr>
-              <a:t>•  Pensar que todo overflow = RCE — Muchos solo causan crash/DoS; depende del control logrado</a:t>
+              <a:t>•  Explica por qué strncpy(dst, src, sizeof(dst)) no siempre es seguro (terminación nula).</a:t>
+            </a:r>
+          </a:p>
+          <a:p>
+            <a:pPr>
+              <a:spcAft>
+                <a:spcPts val="600"/>
+              </a:spcAft>
+            </a:pPr>
+            <a:r>
+              <a:rPr sz="1500">
+                <a:solidFill>
+                  <a:srgbClr val="22282E"/>
+                </a:solidFill>
+              </a:rPr>
+              <a:t>•  Dado un buffer de 32 bytes y saved RBP de 8, ¿cuál es el offset al retorno en x64?</a:t>
+            </a:r>
+          </a:p>
+          <a:p>
+            <a:pPr>
+              <a:spcAft>
+                <a:spcPts val="600"/>
+              </a:spcAft>
+            </a:pPr>
+            <a:r>
+              <a:rPr sz="1500">
+                <a:solidFill>
+                  <a:srgbClr val="22282E"/>
+                </a:solidFill>
+              </a:rPr>
+              <a:t>•  Lista cinco funciones de C inseguras y su reemplazo acotado.</a:t>
+            </a:r>
+          </a:p>
+          <a:p>
+            <a:pPr>
+              <a:spcAft>
+                <a:spcPts val="600"/>
+              </a:spcAft>
+            </a:pPr>
+            <a:r>
+              <a:rPr sz="1500">
+                <a:solidFill>
+                  <a:srgbClr val="22282E"/>
+                </a:solidFill>
+              </a:rPr>
+              <a:t>•  Describe la diferencia entre un overflow que causa DoS y uno que logra RCE.</a:t>
+            </a:r>
+          </a:p>
+          <a:p>
+            <a:pPr>
+              <a:spcAft>
+                <a:spcPts val="600"/>
+              </a:spcAft>
+            </a:pPr>
+            <a:r>
+              <a:rPr sz="1500">
+                <a:solidFill>
+                  <a:srgbClr val="22282E"/>
+                </a:solidFill>
+              </a:rPr>
+              <a:t>•  ¿Por qué un NOP sled aumenta la fiabilidad? ¿Cuándo no ayuda?</a:t>
+            </a:r>
+          </a:p>
+          <a:p>
+            <a:pPr>
+              <a:spcAft>
+                <a:spcPts val="600"/>
+              </a:spcAft>
+            </a:pPr>
+            <a:r>
+              <a:rPr sz="1500">
+                <a:solidFill>
+                  <a:srgbClr val="22282E"/>
+                </a:solidFill>
+              </a:rPr>
+              <a:t>•  Relaciona cada mitigación (NX, canary, ASLR, PIE) con qué parte del ataque bloquea.</a:t>
             </a:r>
           </a:p>
         </p:txBody>
@@ -3347,7 +3365,7 @@
                   <a:srgbClr val="0B3D2E"/>
                 </a:solidFill>
               </a:rPr>
-              <a:t>❓ Preguntas frecuentes</a:t>
+              <a:t>📝 Reto verificable</a:t>
             </a:r>
           </a:p>
         </p:txBody>
@@ -3385,82 +3403,52 @@
                   <a:srgbClr val="22282E"/>
                 </a:solidFill>
               </a:rPr>
-              <a:t>•  ❓ ¿Por qué sobrescribir el retorno y no otra cosa? Porque ret carga esa dirección en RIP</a:t>
-            </a:r>
-          </a:p>
-          <a:p>
-            <a:pPr>
-              <a:spcAft>
-                <a:spcPts val="600"/>
-              </a:spcAft>
-            </a:pPr>
-            <a:r>
-              <a:rPr sz="1500">
-                <a:solidFill>
-                  <a:srgbClr val="22282E"/>
-                </a:solidFill>
-              </a:rPr>
-              <a:t>•  directamente, dándote control de flujo sin trucos adicionales.</a:t>
-            </a:r>
-          </a:p>
-          <a:p>
-            <a:pPr>
-              <a:spcAft>
-                <a:spcPts val="600"/>
-              </a:spcAft>
-            </a:pPr>
-            <a:r>
-              <a:rPr sz="1500">
-                <a:solidFill>
-                  <a:srgbClr val="22282E"/>
-                </a:solidFill>
-              </a:rPr>
-              <a:t>•  ❓ ¿Esto sigue funcionando en binarios modernos? No tal cual: canarios, NX, ASLR y PIE lo</a:t>
-            </a:r>
-          </a:p>
-          <a:p>
-            <a:pPr>
-              <a:spcAft>
-                <a:spcPts val="600"/>
-              </a:spcAft>
-            </a:pPr>
-            <a:r>
-              <a:rPr sz="1500">
-                <a:solidFill>
-                  <a:srgbClr val="22282E"/>
-                </a:solidFill>
-              </a:rPr>
-              <a:t>•  complican. Por eso primero se estudia en un binario sin protecciones.</a:t>
-            </a:r>
-          </a:p>
-          <a:p>
-            <a:pPr>
-              <a:spcAft>
-                <a:spcPts val="600"/>
-              </a:spcAft>
-            </a:pPr>
-            <a:r>
-              <a:rPr sz="1500">
-                <a:solidFill>
-                  <a:srgbClr val="22282E"/>
-                </a:solidFill>
-              </a:rPr>
-              <a:t>•  ❓ ¿Es lo mismo overflow en stack que en heap? No; el heap tiene metadatos y mecánica distinta</a:t>
-            </a:r>
-          </a:p>
-          <a:p>
-            <a:pPr>
-              <a:spcAft>
-                <a:spcPts val="600"/>
-              </a:spcAft>
-            </a:pPr>
-            <a:r>
-              <a:rPr sz="1500">
-                <a:solidFill>
-                  <a:srgbClr val="22282E"/>
-                </a:solidFill>
-              </a:rPr>
-              <a:t>•  (clases 126-127).</a:t>
+              <a:t>•  Redacta y entrega un diagrama del stack frame de vuln con offsets numéricos exactos y una frase</a:t>
+            </a:r>
+          </a:p>
+          <a:p>
+            <a:pPr>
+              <a:spcAft>
+                <a:spcPts val="600"/>
+              </a:spcAft>
+            </a:pPr>
+            <a:r>
+              <a:rPr sz="1500">
+                <a:solidFill>
+                  <a:srgbClr val="22282E"/>
+                </a:solidFill>
+              </a:rPr>
+              <a:t>•  que indique cuántos bytes hay que escribir para alcanzar (sin sobrescribir aún) la dirección de retorno.</a:t>
+            </a:r>
+          </a:p>
+          <a:p>
+            <a:pPr>
+              <a:spcAft>
+                <a:spcPts val="600"/>
+              </a:spcAft>
+            </a:pPr>
+            <a:r>
+              <a:rPr sz="1500">
+                <a:solidFill>
+                  <a:srgbClr val="22282E"/>
+                </a:solidFill>
+              </a:rPr>
+              <a:t>•  Criterio de aceptación: el offset del diagrama coincide con el que confirma cyclic -l en GDB, y</a:t>
+            </a:r>
+          </a:p>
+          <a:p>
+            <a:pPr>
+              <a:spcAft>
+                <a:spcPts val="600"/>
+              </a:spcAft>
+            </a:pPr>
+            <a:r>
+              <a:rPr sz="1500">
+                <a:solidFill>
+                  <a:srgbClr val="22282E"/>
+                </a:solidFill>
+              </a:rPr>
+              <a:t>•  señalas correctamente la posición de saved RBP y ret address.</a:t>
             </a:r>
           </a:p>
         </p:txBody>
@@ -3511,7 +3499,7 @@
                   <a:srgbClr val="0B3D2E"/>
                 </a:solidFill>
               </a:rPr>
-              <a:t>🔗 Referencias</a:t>
+              <a:t>⚠️ Errores comunes</a:t>
             </a:r>
           </a:p>
         </p:txBody>
@@ -3549,6 +3537,319 @@
                   <a:srgbClr val="22282E"/>
                 </a:solidFill>
               </a:rPr>
+              <a:t>•  Offset calculado ≠ real — Olvidaste el saved RBP (8 bytes) o el padding de alineación</a:t>
+            </a:r>
+          </a:p>
+          <a:p>
+            <a:pPr>
+              <a:spcAft>
+                <a:spcPts val="600"/>
+              </a:spcAft>
+            </a:pPr>
+            <a:r>
+              <a:rPr sz="1500">
+                <a:solidFill>
+                  <a:srgbClr val="22282E"/>
+                </a:solidFill>
+              </a:rPr>
+              <a:t>•  "Mi overflow no controla RIP" — Hay stack canary; lo verás en checksec (clase 122)</a:t>
+            </a:r>
+          </a:p>
+          <a:p>
+            <a:pPr>
+              <a:spcAft>
+                <a:spcPts val="600"/>
+              </a:spcAft>
+            </a:pPr>
+            <a:r>
+              <a:rPr sz="1500">
+                <a:solidFill>
+                  <a:srgbClr val="22282E"/>
+                </a:solidFill>
+              </a:rPr>
+              <a:t>•  Confundir dirección alta/baja — El stack crece hacia abajo; dibújalo siempre</a:t>
+            </a:r>
+          </a:p>
+          <a:p>
+            <a:pPr>
+              <a:spcAft>
+                <a:spcPts val="600"/>
+              </a:spcAft>
+            </a:pPr>
+            <a:r>
+              <a:rPr sz="1500">
+                <a:solidFill>
+                  <a:srgbClr val="22282E"/>
+                </a:solidFill>
+              </a:rPr>
+              <a:t>•  Creer que strncpy es infalible — Puede dejar la cadena sin \0; revisa longitudes</a:t>
+            </a:r>
+          </a:p>
+          <a:p>
+            <a:pPr>
+              <a:spcAft>
+                <a:spcPts val="600"/>
+              </a:spcAft>
+            </a:pPr>
+            <a:r>
+              <a:rPr sz="1500">
+                <a:solidFill>
+                  <a:srgbClr val="22282E"/>
+                </a:solidFill>
+              </a:rPr>
+              <a:t>•  Pensar que todo overflow = RCE — Muchos solo causan crash/DoS; depende del control logrado</a:t>
+            </a:r>
+          </a:p>
+        </p:txBody>
+      </p:sp>
+    </p:spTree>
+  </p:cSld>
+  <p:clrMapOvr>
+    <a:masterClrMapping/>
+  </p:clrMapOvr>
+</p:sld>
+</file>
+
+<file path=ppt/slides/slide13.xml><?xml version="1.0" encoding="utf-8"?>
+<p:sld xmlns:a="http://schemas.openxmlformats.org/drawingml/2006/main" xmlns:p="http://schemas.openxmlformats.org/presentationml/2006/main" xmlns:r="http://schemas.openxmlformats.org/officeDocument/2006/relationships">
+  <p:cSld>
+    <p:spTree>
+      <p:nvGrpSpPr>
+        <p:cNvPr id="1" name=""/>
+        <p:cNvGrpSpPr/>
+        <p:nvPr/>
+      </p:nvGrpSpPr>
+      <p:grpSpPr/>
+      <p:sp>
+        <p:nvSpPr>
+          <p:cNvPr id="2" name="TextBox 1"/>
+          <p:cNvSpPr txBox="1"/>
+          <p:nvPr/>
+        </p:nvSpPr>
+        <p:spPr>
+          <a:xfrm>
+            <a:off x="457200" y="320040"/>
+            <a:ext cx="8229600" cy="822960"/>
+          </a:xfrm>
+          <a:prstGeom prst="rect">
+            <a:avLst/>
+          </a:prstGeom>
+          <a:noFill/>
+        </p:spPr>
+        <p:txBody>
+          <a:bodyPr wrap="square">
+            <a:spAutoFit/>
+          </a:bodyPr>
+          <a:lstStyle/>
+          <a:p>
+            <a:r>
+              <a:rPr sz="2600" b="1">
+                <a:solidFill>
+                  <a:srgbClr val="0B3D2E"/>
+                </a:solidFill>
+              </a:rPr>
+              <a:t>❓ Preguntas frecuentes</a:t>
+            </a:r>
+          </a:p>
+        </p:txBody>
+      </p:sp>
+      <p:sp>
+        <p:nvSpPr>
+          <p:cNvPr id="3" name="TextBox 2"/>
+          <p:cNvSpPr txBox="1"/>
+          <p:nvPr/>
+        </p:nvSpPr>
+        <p:spPr>
+          <a:xfrm>
+            <a:off x="457200" y="1280160"/>
+            <a:ext cx="8229600" cy="4937760"/>
+          </a:xfrm>
+          <a:prstGeom prst="rect">
+            <a:avLst/>
+          </a:prstGeom>
+          <a:noFill/>
+        </p:spPr>
+        <p:txBody>
+          <a:bodyPr wrap="square">
+            <a:spAutoFit/>
+          </a:bodyPr>
+          <a:lstStyle/>
+          <a:p>
+            <a:pPr>
+              <a:spcAft>
+                <a:spcPts val="600"/>
+              </a:spcAft>
+            </a:pPr>
+            <a:r>
+              <a:rPr sz="1500">
+                <a:solidFill>
+                  <a:srgbClr val="22282E"/>
+                </a:solidFill>
+              </a:rPr>
+              <a:t>•  ❓ ¿Por qué sobrescribir el retorno y no otra cosa? Porque ret carga esa dirección en RIP</a:t>
+            </a:r>
+          </a:p>
+          <a:p>
+            <a:pPr>
+              <a:spcAft>
+                <a:spcPts val="600"/>
+              </a:spcAft>
+            </a:pPr>
+            <a:r>
+              <a:rPr sz="1500">
+                <a:solidFill>
+                  <a:srgbClr val="22282E"/>
+                </a:solidFill>
+              </a:rPr>
+              <a:t>•  directamente, dándote control de flujo sin trucos adicionales.</a:t>
+            </a:r>
+          </a:p>
+          <a:p>
+            <a:pPr>
+              <a:spcAft>
+                <a:spcPts val="600"/>
+              </a:spcAft>
+            </a:pPr>
+            <a:r>
+              <a:rPr sz="1500">
+                <a:solidFill>
+                  <a:srgbClr val="22282E"/>
+                </a:solidFill>
+              </a:rPr>
+              <a:t>•  ❓ ¿Esto sigue funcionando en binarios modernos? No tal cual: canarios, NX, ASLR y PIE lo</a:t>
+            </a:r>
+          </a:p>
+          <a:p>
+            <a:pPr>
+              <a:spcAft>
+                <a:spcPts val="600"/>
+              </a:spcAft>
+            </a:pPr>
+            <a:r>
+              <a:rPr sz="1500">
+                <a:solidFill>
+                  <a:srgbClr val="22282E"/>
+                </a:solidFill>
+              </a:rPr>
+              <a:t>•  complican. Por eso primero se estudia en un binario sin protecciones.</a:t>
+            </a:r>
+          </a:p>
+          <a:p>
+            <a:pPr>
+              <a:spcAft>
+                <a:spcPts val="600"/>
+              </a:spcAft>
+            </a:pPr>
+            <a:r>
+              <a:rPr sz="1500">
+                <a:solidFill>
+                  <a:srgbClr val="22282E"/>
+                </a:solidFill>
+              </a:rPr>
+              <a:t>•  ❓ ¿Es lo mismo overflow en stack que en heap? No; el heap tiene metadatos y mecánica distinta</a:t>
+            </a:r>
+          </a:p>
+          <a:p>
+            <a:pPr>
+              <a:spcAft>
+                <a:spcPts val="600"/>
+              </a:spcAft>
+            </a:pPr>
+            <a:r>
+              <a:rPr sz="1500">
+                <a:solidFill>
+                  <a:srgbClr val="22282E"/>
+                </a:solidFill>
+              </a:rPr>
+              <a:t>•  (clases 126-127).</a:t>
+            </a:r>
+          </a:p>
+        </p:txBody>
+      </p:sp>
+    </p:spTree>
+  </p:cSld>
+  <p:clrMapOvr>
+    <a:masterClrMapping/>
+  </p:clrMapOvr>
+</p:sld>
+</file>
+
+<file path=ppt/slides/slide14.xml><?xml version="1.0" encoding="utf-8"?>
+<p:sld xmlns:a="http://schemas.openxmlformats.org/drawingml/2006/main" xmlns:p="http://schemas.openxmlformats.org/presentationml/2006/main" xmlns:r="http://schemas.openxmlformats.org/officeDocument/2006/relationships">
+  <p:cSld>
+    <p:spTree>
+      <p:nvGrpSpPr>
+        <p:cNvPr id="1" name=""/>
+        <p:cNvGrpSpPr/>
+        <p:nvPr/>
+      </p:nvGrpSpPr>
+      <p:grpSpPr/>
+      <p:sp>
+        <p:nvSpPr>
+          <p:cNvPr id="2" name="TextBox 1"/>
+          <p:cNvSpPr txBox="1"/>
+          <p:nvPr/>
+        </p:nvSpPr>
+        <p:spPr>
+          <a:xfrm>
+            <a:off x="457200" y="320040"/>
+            <a:ext cx="8229600" cy="822960"/>
+          </a:xfrm>
+          <a:prstGeom prst="rect">
+            <a:avLst/>
+          </a:prstGeom>
+          <a:noFill/>
+        </p:spPr>
+        <p:txBody>
+          <a:bodyPr wrap="square">
+            <a:spAutoFit/>
+          </a:bodyPr>
+          <a:lstStyle/>
+          <a:p>
+            <a:r>
+              <a:rPr sz="2600" b="1">
+                <a:solidFill>
+                  <a:srgbClr val="0B3D2E"/>
+                </a:solidFill>
+              </a:rPr>
+              <a:t>🔗 Referencias</a:t>
+            </a:r>
+          </a:p>
+        </p:txBody>
+      </p:sp>
+      <p:sp>
+        <p:nvSpPr>
+          <p:cNvPr id="3" name="TextBox 2"/>
+          <p:cNvSpPr txBox="1"/>
+          <p:nvPr/>
+        </p:nvSpPr>
+        <p:spPr>
+          <a:xfrm>
+            <a:off x="457200" y="1280160"/>
+            <a:ext cx="8229600" cy="4937760"/>
+          </a:xfrm>
+          <a:prstGeom prst="rect">
+            <a:avLst/>
+          </a:prstGeom>
+          <a:noFill/>
+        </p:spPr>
+        <p:txBody>
+          <a:bodyPr wrap="square">
+            <a:spAutoFit/>
+          </a:bodyPr>
+          <a:lstStyle/>
+          <a:p>
+            <a:pPr>
+              <a:spcAft>
+                <a:spcPts val="600"/>
+              </a:spcAft>
+            </a:pPr>
+            <a:r>
+              <a:rPr sz="1500">
+                <a:solidFill>
+                  <a:srgbClr val="22282E"/>
+                </a:solidFill>
+              </a:rPr>
               <a:t>•  Aleph One, "Smashing the Stack for Fun and Profit", Phrack 49 — &lt;http://phrack.org/issues/49/14.html&gt;</a:t>
             </a:r>
           </a:p>
@@ -3599,6 +3900,81 @@
           </a:p>
         </p:txBody>
       </p:sp>
+    </p:spTree>
+  </p:cSld>
+  <p:clrMapOvr>
+    <a:masterClrMapping/>
+  </p:clrMapOvr>
+</p:sld>
+</file>
+
+<file path=ppt/slides/slide15.xml><?xml version="1.0" encoding="utf-8"?>
+<p:sld xmlns:a="http://schemas.openxmlformats.org/drawingml/2006/main" xmlns:p="http://schemas.openxmlformats.org/presentationml/2006/main" xmlns:r="http://schemas.openxmlformats.org/officeDocument/2006/relationships">
+  <p:cSld>
+    <p:spTree>
+      <p:nvGrpSpPr>
+        <p:cNvPr id="1" name=""/>
+        <p:cNvGrpSpPr/>
+        <p:nvPr/>
+      </p:nvGrpSpPr>
+      <p:grpSpPr/>
+      <p:sp>
+        <p:nvSpPr>
+          <p:cNvPr id="2" name="TextBox 1"/>
+          <p:cNvSpPr txBox="1"/>
+          <p:nvPr/>
+        </p:nvSpPr>
+        <p:spPr>
+          <a:xfrm>
+            <a:off x="457200" y="274320"/>
+            <a:ext cx="8229600" cy="640080"/>
+          </a:xfrm>
+          <a:prstGeom prst="rect">
+            <a:avLst/>
+          </a:prstGeom>
+          <a:noFill/>
+        </p:spPr>
+        <p:txBody>
+          <a:bodyPr wrap="square">
+            <a:spAutoFit/>
+          </a:bodyPr>
+          <a:lstStyle/>
+          <a:p>
+            <a:r>
+              <a:rPr sz="2200" b="1">
+                <a:solidFill>
+                  <a:srgbClr val="0B3D2E"/>
+                </a:solidFill>
+              </a:rPr>
+              <a:t>Diagrama de la clase</a:t>
+            </a:r>
+          </a:p>
+        </p:txBody>
+      </p:sp>
+      <p:pic>
+        <p:nvPicPr>
+          <p:cNvPr id="3" name="Picture 2" descr="8d5252d9a304cbba.png"/>
+          <p:cNvPicPr>
+            <a:picLocks noChangeAspect="1"/>
+          </p:cNvPicPr>
+          <p:nvPr/>
+        </p:nvPicPr>
+        <p:blipFill>
+          <a:blip r:embed="rId2"/>
+          <a:stretch>
+            <a:fillRect/>
+          </a:stretch>
+        </p:blipFill>
+        <p:spPr>
+          <a:xfrm>
+            <a:off x="3673981" y="1097280"/>
+            <a:ext cx="1796038" cy="5303520"/>
+          </a:xfrm>
+          <a:prstGeom prst="rect">
+            <a:avLst/>
+          </a:prstGeom>
+        </p:spPr>
+      </p:pic>
     </p:spTree>
   </p:cSld>
   <p:clrMapOvr>
@@ -4122,7 +4498,7 @@
                   <a:srgbClr val="0B3D2E"/>
                 </a:solidFill>
               </a:rPr>
-              <a:t>📖 Definiciones y características</a:t>
+              <a:t>🧠 Explicación en profundidad</a:t>
             </a:r>
           </a:p>
         </p:txBody>
@@ -4160,97 +4536,97 @@
                   <a:srgbClr val="22282E"/>
                 </a:solidFill>
               </a:rPr>
-              <a:t>•  Buffer overflow: escritura de más datos de los que caben en un buffer, invadiendo memoria</a:t>
-            </a:r>
-          </a:p>
-          <a:p>
-            <a:pPr>
-              <a:spcAft>
-                <a:spcPts val="600"/>
-              </a:spcAft>
-            </a:pPr>
-            <a:r>
-              <a:rPr sz="1500">
-                <a:solidFill>
-                  <a:srgbClr val="22282E"/>
-                </a:solidFill>
-              </a:rPr>
-              <a:t>•  adyacente. Clave: en el stack, esa memoria suele ser saved RBP y la dirección de retorno.</a:t>
-            </a:r>
-          </a:p>
-          <a:p>
-            <a:pPr>
-              <a:spcAft>
-                <a:spcPts val="600"/>
-              </a:spcAft>
-            </a:pPr>
-            <a:r>
-              <a:rPr sz="1500">
-                <a:solidFill>
-                  <a:srgbClr val="22282E"/>
-                </a:solidFill>
-              </a:rPr>
-              <a:t>•  Out-of-bounds write: acceso de escritura fuera del rango válido de un objeto. Clave: CWE-787,</a:t>
-            </a:r>
-          </a:p>
-          <a:p>
-            <a:pPr>
-              <a:spcAft>
-                <a:spcPts val="600"/>
-              </a:spcAft>
-            </a:pPr>
-            <a:r>
-              <a:rPr sz="1500">
-                <a:solidFill>
-                  <a:srgbClr val="22282E"/>
-                </a:solidFill>
-              </a:rPr>
-              <a:t>•  consistentemente entre las debilidades más peligrosas.</a:t>
-            </a:r>
-          </a:p>
-          <a:p>
-            <a:pPr>
-              <a:spcAft>
-                <a:spcPts val="600"/>
-              </a:spcAft>
-            </a:pPr>
-            <a:r>
-              <a:rPr sz="1500">
-                <a:solidFill>
-                  <a:srgbClr val="22282E"/>
-                </a:solidFill>
-              </a:rPr>
-              <a:t>•  Offset al retorno: distancia en bytes desde el inicio del buffer hasta la dirección de retorno.</a:t>
-            </a:r>
-          </a:p>
-          <a:p>
-            <a:pPr>
-              <a:spcAft>
-                <a:spcPts val="600"/>
-              </a:spcAft>
-            </a:pPr>
-            <a:r>
-              <a:rPr sz="1500">
-                <a:solidFill>
-                  <a:srgbClr val="22282E"/>
-                </a:solidFill>
-              </a:rPr>
-              <a:t>•  Clave: tamañobuffer + padding + saved RBP.</a:t>
-            </a:r>
-          </a:p>
-          <a:p>
-            <a:pPr>
-              <a:spcAft>
-                <a:spcPts val="600"/>
-              </a:spcAft>
-            </a:pPr>
-            <a:r>
-              <a:rPr sz="1500">
-                <a:solidFill>
-                  <a:srgbClr val="22282E"/>
-                </a:solidFill>
-              </a:rPr>
-              <a:t>•  Control de RIP: lograr que la CPU ejecute una dirección elegida por el atacante. Clave: con</a:t>
+              <a:t>•  El buffer overflow de stack es la vulnerabilidad que fundó la disciplina del exploiting, y su</a:t>
+            </a:r>
+          </a:p>
+          <a:p>
+            <a:pPr>
+              <a:spcAft>
+                <a:spcPts val="600"/>
+              </a:spcAft>
+            </a:pPr>
+            <a:r>
+              <a:rPr sz="1500">
+                <a:solidFill>
+                  <a:srgbClr val="22282E"/>
+                </a:solidFill>
+              </a:rPr>
+              <a:t>•  mecánica es sencilla de enunciar: un programa reserva un buffer de tamaño fijo en la pila y</a:t>
+            </a:r>
+          </a:p>
+          <a:p>
+            <a:pPr>
+              <a:spcAft>
+                <a:spcPts val="600"/>
+              </a:spcAft>
+            </a:pPr>
+            <a:r>
+              <a:rPr sz="1500">
+                <a:solidFill>
+                  <a:srgbClr val="22282E"/>
+                </a:solidFill>
+              </a:rPr>
+              <a:t>•  luego escribe en él más datos de los que caben, sin comprobar el límite. Como la pila crece</a:t>
+            </a:r>
+          </a:p>
+          <a:p>
+            <a:pPr>
+              <a:spcAft>
+                <a:spcPts val="600"/>
+              </a:spcAft>
+            </a:pPr>
+            <a:r>
+              <a:rPr sz="1500">
+                <a:solidFill>
+                  <a:srgbClr val="22282E"/>
+                </a:solidFill>
+              </a:rPr>
+              <a:t>•  hacia direcciones bajas pero los datos se escriben hacia direcciones altas, el exceso avanza</a:t>
+            </a:r>
+          </a:p>
+          <a:p>
+            <a:pPr>
+              <a:spcAft>
+                <a:spcPts val="600"/>
+              </a:spcAft>
+            </a:pPr>
+            <a:r>
+              <a:rPr sz="1500">
+                <a:solidFill>
+                  <a:srgbClr val="22282E"/>
+                </a:solidFill>
+              </a:rPr>
+              <a:t>•  sobre lo que hay por encima del buffer en el marco: primero otras variables locales, después el</a:t>
+            </a:r>
+          </a:p>
+          <a:p>
+            <a:pPr>
+              <a:spcAft>
+                <a:spcPts val="600"/>
+              </a:spcAft>
+            </a:pPr>
+            <a:r>
+              <a:rPr sz="1500">
+                <a:solidFill>
+                  <a:srgbClr val="22282E"/>
+                </a:solidFill>
+              </a:rPr>
+              <a:t>•  RBP guardado, y finalmente la dirección de retorno. Ahí está el premio, porque esa</a:t>
+            </a:r>
+          </a:p>
+          <a:p>
+            <a:pPr>
+              <a:spcAft>
+                <a:spcPts val="600"/>
+              </a:spcAft>
+            </a:pPr>
+            <a:r>
+              <a:rPr sz="1500">
+                <a:solidFill>
+                  <a:srgbClr val="22282E"/>
+                </a:solidFill>
+              </a:rPr>
+              <a:t>•  dirección es la que ret cargará en RIP cuando la función termine.</a:t>
             </a:r>
           </a:p>
         </p:txBody>
@@ -4301,7 +4677,7 @@
                   <a:srgbClr val="0B3D2E"/>
                 </a:solidFill>
               </a:rPr>
-              <a:t>🧰 Herramientas y preparación</a:t>
+              <a:t>📖 Definiciones y características</a:t>
             </a:r>
           </a:p>
         </p:txBody>
@@ -4339,37 +4715,97 @@
                   <a:srgbClr val="22282E"/>
                 </a:solidFill>
               </a:rPr>
-              <a:t>•  Esta clase es conceptual, pero conviene tener listos GDB+pwndbg (clase 118) y un editor. Prepara un</a:t>
-            </a:r>
-          </a:p>
-          <a:p>
-            <a:pPr>
-              <a:spcAft>
-                <a:spcPts val="600"/>
-              </a:spcAft>
-            </a:pPr>
-            <a:r>
-              <a:rPr sz="1500">
-                <a:solidFill>
-                  <a:srgbClr val="22282E"/>
-                </a:solidFill>
-              </a:rPr>
-              <a:t>•  diagrama en papel o en un .md del stack para razonar los offsets.</a:t>
-            </a:r>
-          </a:p>
-          <a:p>
-            <a:pPr>
-              <a:spcAft>
-                <a:spcPts val="600"/>
-              </a:spcAft>
-            </a:pPr>
-            <a:r>
-              <a:rPr sz="1500">
-                <a:solidFill>
-                  <a:srgbClr val="22282E"/>
-                </a:solidFill>
-              </a:rPr>
-              <a:t>•  checksec --file=/bin/ls    # instalar: pip install pwntools (trae checksec)</a:t>
+              <a:t>•  Buffer overflow: escritura de más datos de los que caben en un buffer, invadiendo memoria</a:t>
+            </a:r>
+          </a:p>
+          <a:p>
+            <a:pPr>
+              <a:spcAft>
+                <a:spcPts val="600"/>
+              </a:spcAft>
+            </a:pPr>
+            <a:r>
+              <a:rPr sz="1500">
+                <a:solidFill>
+                  <a:srgbClr val="22282E"/>
+                </a:solidFill>
+              </a:rPr>
+              <a:t>•  adyacente. Clave: en el stack, esa memoria suele ser saved RBP y la dirección de retorno.</a:t>
+            </a:r>
+          </a:p>
+          <a:p>
+            <a:pPr>
+              <a:spcAft>
+                <a:spcPts val="600"/>
+              </a:spcAft>
+            </a:pPr>
+            <a:r>
+              <a:rPr sz="1500">
+                <a:solidFill>
+                  <a:srgbClr val="22282E"/>
+                </a:solidFill>
+              </a:rPr>
+              <a:t>•  Out-of-bounds write: acceso de escritura fuera del rango válido de un objeto. Clave: CWE-787,</a:t>
+            </a:r>
+          </a:p>
+          <a:p>
+            <a:pPr>
+              <a:spcAft>
+                <a:spcPts val="600"/>
+              </a:spcAft>
+            </a:pPr>
+            <a:r>
+              <a:rPr sz="1500">
+                <a:solidFill>
+                  <a:srgbClr val="22282E"/>
+                </a:solidFill>
+              </a:rPr>
+              <a:t>•  consistentemente entre las debilidades más peligrosas.</a:t>
+            </a:r>
+          </a:p>
+          <a:p>
+            <a:pPr>
+              <a:spcAft>
+                <a:spcPts val="600"/>
+              </a:spcAft>
+            </a:pPr>
+            <a:r>
+              <a:rPr sz="1500">
+                <a:solidFill>
+                  <a:srgbClr val="22282E"/>
+                </a:solidFill>
+              </a:rPr>
+              <a:t>•  Offset al retorno: distancia en bytes desde el inicio del buffer hasta la dirección de retorno.</a:t>
+            </a:r>
+          </a:p>
+          <a:p>
+            <a:pPr>
+              <a:spcAft>
+                <a:spcPts val="600"/>
+              </a:spcAft>
+            </a:pPr>
+            <a:r>
+              <a:rPr sz="1500">
+                <a:solidFill>
+                  <a:srgbClr val="22282E"/>
+                </a:solidFill>
+              </a:rPr>
+              <a:t>•  Clave: tamañobuffer + padding + saved RBP.</a:t>
+            </a:r>
+          </a:p>
+          <a:p>
+            <a:pPr>
+              <a:spcAft>
+                <a:spcPts val="600"/>
+              </a:spcAft>
+            </a:pPr>
+            <a:r>
+              <a:rPr sz="1500">
+                <a:solidFill>
+                  <a:srgbClr val="22282E"/>
+                </a:solidFill>
+              </a:rPr>
+              <a:t>•  Control de RIP: lograr que la CPU ejecute una dirección elegida por el atacante. Clave: con</a:t>
             </a:r>
           </a:p>
         </p:txBody>
@@ -4420,7 +4856,7 @@
                   <a:srgbClr val="0B3D2E"/>
                 </a:solidFill>
               </a:rPr>
-              <a:t>🧪 Laboratorio guiado</a:t>
+              <a:t>📔 Glosario</a:t>
             </a:r>
           </a:p>
         </p:txBody>
@@ -4458,97 +4894,97 @@
                   <a:srgbClr val="22282E"/>
                 </a:solidFill>
               </a:rPr>
-              <a:t>•  Toma el binario vuln de la clase 118 y ábrelo en pwndbg.</a:t>
-            </a:r>
-          </a:p>
-          <a:p>
-            <a:pPr>
-              <a:spcAft>
-                <a:spcPts val="600"/>
-              </a:spcAft>
-            </a:pPr>
-            <a:r>
-              <a:rPr sz="1500">
-                <a:solidFill>
-                  <a:srgbClr val="22282E"/>
-                </a:solidFill>
-              </a:rPr>
-              <a:t>•  Desensambla vuln y anota el tamaño reservado para el buffer (sub rsp, 0x50 → 80 bytes).</a:t>
-            </a:r>
-          </a:p>
-          <a:p>
-            <a:pPr>
-              <a:spcAft>
-                <a:spcPts val="600"/>
-              </a:spcAft>
-            </a:pPr>
-            <a:r>
-              <a:rPr sz="1500">
-                <a:solidFill>
-                  <a:srgbClr val="22282E"/>
-                </a:solidFill>
-              </a:rPr>
-              <a:t>•  Dibuja en papel el frame de vuln de arriba (direcciones altas) a abajo:</a:t>
-            </a:r>
-          </a:p>
-          <a:p>
-            <a:pPr>
-              <a:spcAft>
-                <a:spcPts val="600"/>
-              </a:spcAft>
-            </a:pPr>
-            <a:r>
-              <a:rPr sz="1500">
-                <a:solidFill>
-                  <a:srgbClr val="22282E"/>
-                </a:solidFill>
-              </a:rPr>
-              <a:t>•  [ ret address ]  &lt;- rbp+8   (objetivo)</a:t>
-            </a:r>
-          </a:p>
-          <a:p>
-            <a:pPr>
-              <a:spcAft>
-                <a:spcPts val="600"/>
-              </a:spcAft>
-            </a:pPr>
-            <a:r>
-              <a:rPr sz="1500">
-                <a:solidFill>
-                  <a:srgbClr val="22282E"/>
-                </a:solidFill>
-              </a:rPr>
-              <a:t>•  [ saved RBP   ]  &lt;- rbp</a:t>
-            </a:r>
-          </a:p>
-          <a:p>
-            <a:pPr>
-              <a:spcAft>
-                <a:spcPts val="600"/>
-              </a:spcAft>
-            </a:pPr>
-            <a:r>
-              <a:rPr sz="1500">
-                <a:solidFill>
-                  <a:srgbClr val="22282E"/>
-                </a:solidFill>
-              </a:rPr>
-              <a:t>•  [ buf[63..0]  ]  &lt;- rbp-0x40 ... crece hacia rbp</a:t>
-            </a:r>
-          </a:p>
-          <a:p>
-            <a:pPr>
-              <a:spcAft>
-                <a:spcPts val="600"/>
-              </a:spcAft>
-            </a:pPr>
-            <a:r>
-              <a:rPr sz="1500">
-                <a:solidFill>
-                  <a:srgbClr val="22282E"/>
-                </a:solidFill>
-              </a:rPr>
-              <a:t>•  Calcula el offset teórico al retorno y contrástalo con el valor que hallaste con cyclic en la 118.</a:t>
+              <a:t>•  Término — Definición concisa</a:t>
+            </a:r>
+          </a:p>
+          <a:p>
+            <a:pPr>
+              <a:spcAft>
+                <a:spcPts val="600"/>
+              </a:spcAft>
+            </a:pPr>
+            <a:r>
+              <a:rPr sz="1500">
+                <a:solidFill>
+                  <a:srgbClr val="22282E"/>
+                </a:solidFill>
+              </a:rPr>
+              <a:t>•  Buffer — Región de tamaño fijo reservada para datos</a:t>
+            </a:r>
+          </a:p>
+          <a:p>
+            <a:pPr>
+              <a:spcAft>
+                <a:spcPts val="600"/>
+              </a:spcAft>
+            </a:pPr>
+            <a:r>
+              <a:rPr sz="1500">
+                <a:solidFill>
+                  <a:srgbClr val="22282E"/>
+                </a:solidFill>
+              </a:rPr>
+              <a:t>•  Buffer overflow — Escribir más datos de los que caben en el buffer</a:t>
+            </a:r>
+          </a:p>
+          <a:p>
+            <a:pPr>
+              <a:spcAft>
+                <a:spcPts val="600"/>
+              </a:spcAft>
+            </a:pPr>
+            <a:r>
+              <a:rPr sz="1500">
+                <a:solidFill>
+                  <a:srgbClr val="22282E"/>
+                </a:solidFill>
+              </a:rPr>
+              <a:t>•  Escritura fuera de límites — El exceso sobrescribe memoria adyacente</a:t>
+            </a:r>
+          </a:p>
+          <a:p>
+            <a:pPr>
+              <a:spcAft>
+                <a:spcPts val="600"/>
+              </a:spcAft>
+            </a:pPr>
+            <a:r>
+              <a:rPr sz="1500">
+                <a:solidFill>
+                  <a:srgbClr val="22282E"/>
+                </a:solidFill>
+              </a:rPr>
+              <a:t>•  Saved RBP — Copia del RBP anterior, adyacente a la dirección de retorno</a:t>
+            </a:r>
+          </a:p>
+          <a:p>
+            <a:pPr>
+              <a:spcAft>
+                <a:spcPts val="600"/>
+              </a:spcAft>
+            </a:pPr>
+            <a:r>
+              <a:rPr sz="1500">
+                <a:solidFill>
+                  <a:srgbClr val="22282E"/>
+                </a:solidFill>
+              </a:rPr>
+              <a:t>•  Offset — Bytes desde el inicio del buffer hasta la dirección de retorno</a:t>
+            </a:r>
+          </a:p>
+          <a:p>
+            <a:pPr>
+              <a:spcAft>
+                <a:spcPts val="600"/>
+              </a:spcAft>
+            </a:pPr>
+            <a:r>
+              <a:rPr sz="1500">
+                <a:solidFill>
+                  <a:srgbClr val="22282E"/>
+                </a:solidFill>
+              </a:rPr>
+              <a:t>•  Control de RIP — Objetivo: fijar la dirección a la que salta ret</a:t>
             </a:r>
           </a:p>
         </p:txBody>
@@ -4599,7 +5035,7 @@
                   <a:srgbClr val="0B3D2E"/>
                 </a:solidFill>
               </a:rPr>
-              <a:t>✍️ Ejercicios</a:t>
+              <a:t>🧰 Herramientas y preparación</a:t>
             </a:r>
           </a:p>
         </p:txBody>
@@ -4637,82 +5073,22 @@
                   <a:srgbClr val="22282E"/>
                 </a:solidFill>
               </a:rPr>
-              <a:t>•  Explica por qué strncpy(dst, src, sizeof(dst)) no siempre es seguro (terminación nula).</a:t>
-            </a:r>
-          </a:p>
-          <a:p>
-            <a:pPr>
-              <a:spcAft>
-                <a:spcPts val="600"/>
-              </a:spcAft>
-            </a:pPr>
-            <a:r>
-              <a:rPr sz="1500">
-                <a:solidFill>
-                  <a:srgbClr val="22282E"/>
-                </a:solidFill>
-              </a:rPr>
-              <a:t>•  Dado un buffer de 32 bytes y saved RBP de 8, ¿cuál es el offset al retorno en x64?</a:t>
-            </a:r>
-          </a:p>
-          <a:p>
-            <a:pPr>
-              <a:spcAft>
-                <a:spcPts val="600"/>
-              </a:spcAft>
-            </a:pPr>
-            <a:r>
-              <a:rPr sz="1500">
-                <a:solidFill>
-                  <a:srgbClr val="22282E"/>
-                </a:solidFill>
-              </a:rPr>
-              <a:t>•  Lista cinco funciones de C inseguras y su reemplazo acotado.</a:t>
-            </a:r>
-          </a:p>
-          <a:p>
-            <a:pPr>
-              <a:spcAft>
-                <a:spcPts val="600"/>
-              </a:spcAft>
-            </a:pPr>
-            <a:r>
-              <a:rPr sz="1500">
-                <a:solidFill>
-                  <a:srgbClr val="22282E"/>
-                </a:solidFill>
-              </a:rPr>
-              <a:t>•  Describe la diferencia entre un overflow que causa DoS y uno que logra RCE.</a:t>
-            </a:r>
-          </a:p>
-          <a:p>
-            <a:pPr>
-              <a:spcAft>
-                <a:spcPts val="600"/>
-              </a:spcAft>
-            </a:pPr>
-            <a:r>
-              <a:rPr sz="1500">
-                <a:solidFill>
-                  <a:srgbClr val="22282E"/>
-                </a:solidFill>
-              </a:rPr>
-              <a:t>•  ¿Por qué un NOP sled aumenta la fiabilidad? ¿Cuándo no ayuda?</a:t>
-            </a:r>
-          </a:p>
-          <a:p>
-            <a:pPr>
-              <a:spcAft>
-                <a:spcPts val="600"/>
-              </a:spcAft>
-            </a:pPr>
-            <a:r>
-              <a:rPr sz="1500">
-                <a:solidFill>
-                  <a:srgbClr val="22282E"/>
-                </a:solidFill>
-              </a:rPr>
-              <a:t>•  Relaciona cada mitigación (NX, canary, ASLR, PIE) con qué parte del ataque bloquea.</a:t>
+              <a:t>•  Esta clase es conceptual, pero conviene tener listos GDB+pwndbg (clase 118) y un editor. Prepara un</a:t>
+            </a:r>
+          </a:p>
+          <a:p>
+            <a:pPr>
+              <a:spcAft>
+                <a:spcPts val="600"/>
+              </a:spcAft>
+            </a:pPr>
+            <a:r>
+              <a:rPr sz="1500">
+                <a:solidFill>
+                  <a:srgbClr val="22282E"/>
+                </a:solidFill>
+              </a:rPr>
+              <a:t>•  diagrama en papel o en un .md del stack para razonar los offsets.</a:t>
             </a:r>
           </a:p>
         </p:txBody>
@@ -4763,7 +5139,7 @@
                   <a:srgbClr val="0B3D2E"/>
                 </a:solidFill>
               </a:rPr>
-              <a:t>📝 Reto verificable</a:t>
+              <a:t>🧪 Laboratorio guiado</a:t>
             </a:r>
           </a:p>
         </p:txBody>
@@ -4801,52 +5177,97 @@
                   <a:srgbClr val="22282E"/>
                 </a:solidFill>
               </a:rPr>
-              <a:t>•  Redacta y entrega un diagrama del stack frame de vuln con offsets numéricos exactos y una frase</a:t>
-            </a:r>
-          </a:p>
-          <a:p>
-            <a:pPr>
-              <a:spcAft>
-                <a:spcPts val="600"/>
-              </a:spcAft>
-            </a:pPr>
-            <a:r>
-              <a:rPr sz="1500">
-                <a:solidFill>
-                  <a:srgbClr val="22282E"/>
-                </a:solidFill>
-              </a:rPr>
-              <a:t>•  que indique cuántos bytes hay que escribir para alcanzar (sin sobrescribir aún) la dirección de retorno.</a:t>
-            </a:r>
-          </a:p>
-          <a:p>
-            <a:pPr>
-              <a:spcAft>
-                <a:spcPts val="600"/>
-              </a:spcAft>
-            </a:pPr>
-            <a:r>
-              <a:rPr sz="1500">
-                <a:solidFill>
-                  <a:srgbClr val="22282E"/>
-                </a:solidFill>
-              </a:rPr>
-              <a:t>•  Criterio de aceptación: el offset del diagrama coincide con el que confirma cyclic -l en GDB, y</a:t>
-            </a:r>
-          </a:p>
-          <a:p>
-            <a:pPr>
-              <a:spcAft>
-                <a:spcPts val="600"/>
-              </a:spcAft>
-            </a:pPr>
-            <a:r>
-              <a:rPr sz="1500">
-                <a:solidFill>
-                  <a:srgbClr val="22282E"/>
-                </a:solidFill>
-              </a:rPr>
-              <a:t>•  señalas correctamente la posición de saved RBP y ret address.</a:t>
+              <a:t>•  Toma el binario vuln de la clase 118 y ábrelo en pwndbg.</a:t>
+            </a:r>
+          </a:p>
+          <a:p>
+            <a:pPr>
+              <a:spcAft>
+                <a:spcPts val="600"/>
+              </a:spcAft>
+            </a:pPr>
+            <a:r>
+              <a:rPr sz="1500">
+                <a:solidFill>
+                  <a:srgbClr val="22282E"/>
+                </a:solidFill>
+              </a:rPr>
+              <a:t>•  Desensambla vuln y anota el tamaño del frame que reserva el prólogo (sub rsp, 0x50 → 80 bytes). Ojo: eso no es el tamaño del buffer. El buffer vive en [rbp-0x40] (64 bytes); el offset desde su inicio…</a:t>
+            </a:r>
+          </a:p>
+          <a:p>
+            <a:pPr>
+              <a:spcAft>
+                <a:spcPts val="600"/>
+              </a:spcAft>
+            </a:pPr>
+            <a:r>
+              <a:rPr sz="1500">
+                <a:solidFill>
+                  <a:srgbClr val="22282E"/>
+                </a:solidFill>
+              </a:rPr>
+              <a:t>•  Dibuja en papel el frame de vuln de arriba (direcciones altas) a abajo:</a:t>
+            </a:r>
+          </a:p>
+          <a:p>
+            <a:pPr>
+              <a:spcAft>
+                <a:spcPts val="600"/>
+              </a:spcAft>
+            </a:pPr>
+            <a:r>
+              <a:rPr sz="1500">
+                <a:solidFill>
+                  <a:srgbClr val="22282E"/>
+                </a:solidFill>
+              </a:rPr>
+              <a:t>•  Calcula el offset teórico al retorno y contrástalo con el valor que hallaste con cyclic en la 118.</a:t>
+            </a:r>
+          </a:p>
+          <a:p>
+            <a:pPr>
+              <a:spcAft>
+                <a:spcPts val="600"/>
+              </a:spcAft>
+            </a:pPr>
+            <a:r>
+              <a:rPr sz="1500">
+                <a:solidFill>
+                  <a:srgbClr val="22282E"/>
+                </a:solidFill>
+              </a:rPr>
+              <a:t>•  Identifica en el código fuente qué función provoca el overflow (gets) y qué la haría segura (fgets).</a:t>
+            </a:r>
+          </a:p>
+          <a:p>
+            <a:pPr>
+              <a:spcAft>
+                <a:spcPts val="600"/>
+              </a:spcAft>
+            </a:pPr>
+            <a:r>
+              <a:rPr sz="1500">
+                <a:solidFill>
+                  <a:srgbClr val="22282E"/>
+                </a:solidFill>
+              </a:rPr>
+              <a:t>•  Ejecuta checksec ./vuln y anota qué mitigaciones están desactivadas (NX, canary, PIE) y por qué</a:t>
+            </a:r>
+          </a:p>
+          <a:p>
+            <a:pPr>
+              <a:spcAft>
+                <a:spcPts val="600"/>
+              </a:spcAft>
+            </a:pPr>
+            <a:r>
+              <a:rPr sz="1500">
+                <a:solidFill>
+                  <a:srgbClr val="22282E"/>
+                </a:solidFill>
+              </a:rPr>
+              <a:t>•  eso hace el binario explotable — lo aprovecharás en la clase 120.</a:t>
             </a:r>
           </a:p>
         </p:txBody>
